--- a/templates/40-root-cause-analysis-template.pptx
+++ b/templates/40-root-cause-analysis-template.pptx
@@ -3558,7 +3558,7 @@
         <p:spPr>
           <a:xfrm>
             <a:off x="457200" y="1207008"/>
-            <a:ext cx="2743200" cy="182880"/>
+            <a:ext cx="11277295" cy="274320"/>
           </a:xfrm>
           <a:prstGeom prst="rect">
             <a:avLst/>
@@ -3574,13 +3574,13 @@
           <a:p>
             <a:pPr algn="l"/>
             <a:r>
-              <a:rPr lang="en-AU" sz="800" b="1" dirty="0">
+              <a:rPr lang="en-AU" sz="1250" b="1" dirty="0">
                 <a:solidFill>
-                  <a:srgbClr val="6B6A66"/>
+                  <a:srgbClr val="184F95"/>
                 </a:solidFill>
                 <a:latin typeface="Aptos"/>
               </a:rPr>
-              <a:t>HOW TO FILL IT IN</a:t>
+              <a:t>Root Cause Analysis — blank template</a:t>
             </a:r>
           </a:p>
         </p:txBody>
@@ -3593,8 +3593,8 @@
         </p:nvSpPr>
         <p:spPr>
           <a:xfrm>
-            <a:off x="457200" y="1408176"/>
-            <a:ext cx="2743200" cy="914400"/>
+            <a:off x="457200" y="6089904"/>
+            <a:ext cx="11277295" cy="347472"/>
           </a:xfrm>
           <a:prstGeom prst="rect">
             <a:avLst/>
@@ -3610,9 +3610,9 @@
           <a:p>
             <a:pPr algn="l"/>
             <a:r>
-              <a:rPr lang="en-AU" sz="950" dirty="0">
+              <a:rPr lang="en-AU" sz="850" dirty="0">
                 <a:solidFill>
-                  <a:srgbClr val="0B0B0B"/>
+                  <a:srgbClr val="6B6A66"/>
                 </a:solidFill>
                 <a:latin typeface="Aptos"/>
               </a:rPr>
@@ -3629,8 +3629,8 @@
         </p:nvSpPr>
         <p:spPr>
           <a:xfrm>
-            <a:off x="457200" y="2414016"/>
-            <a:ext cx="2743200" cy="182880"/>
+            <a:off x="457200" y="1481328"/>
+            <a:ext cx="11277295" cy="201168"/>
           </a:xfrm>
           <a:prstGeom prst="rect">
             <a:avLst/>
@@ -3641,254 +3641,6 @@
           </a:ln>
         </p:spPr>
         <p:txBody>
-          <a:bodyPr wrap="square" anchor="b" lIns="0" rIns="0" tIns="27432" bIns="27432"/>
-          <a:lstStyle/>
-          <a:p>
-            <a:pPr algn="l"/>
-            <a:r>
-              <a:rPr lang="en-AU" sz="800" b="1" dirty="0">
-                <a:solidFill>
-                  <a:srgbClr val="6B6A66"/>
-                </a:solidFill>
-                <a:latin typeface="Aptos"/>
-              </a:rPr>
-              <a:t>WHAT IT IS FOR</a:t>
-            </a:r>
-          </a:p>
-        </p:txBody>
-      </p:sp>
-      <p:sp>
-        <p:nvSpPr>
-          <p:cNvPr id="40" name="shape40"/>
-          <p:cNvSpPr/>
-          <p:nvPr/>
-        </p:nvSpPr>
-        <p:spPr>
-          <a:xfrm>
-            <a:off x="457200" y="2615184"/>
-            <a:ext cx="2743200" cy="731520"/>
-          </a:xfrm>
-          <a:prstGeom prst="rect">
-            <a:avLst/>
-          </a:prstGeom>
-          <a:noFill/>
-          <a:ln>
-            <a:noFill/>
-          </a:ln>
-        </p:spPr>
-        <p:txBody>
-          <a:bodyPr wrap="square" anchor="t" lIns="0" rIns="0" tIns="27432" bIns="27432"/>
-          <a:lstStyle/>
-          <a:p>
-            <a:pPr algn="l"/>
-            <a:r>
-              <a:rPr lang="en-AU" sz="950" dirty="0">
-                <a:solidFill>
-                  <a:srgbClr val="0B0B0B"/>
-                </a:solidFill>
-                <a:latin typeface="Aptos"/>
-              </a:rPr>
-              <a:t>Traces a problem back past its symptoms to the condition that produces it, using structured questioning or cause-and-effect mapping.</a:t>
-            </a:r>
-          </a:p>
-        </p:txBody>
-      </p:sp>
-      <p:sp>
-        <p:nvSpPr>
-          <p:cNvPr id="41" name="shape41"/>
-          <p:cNvSpPr/>
-          <p:nvPr/>
-        </p:nvSpPr>
-        <p:spPr>
-          <a:xfrm>
-            <a:off x="457200" y="3438144"/>
-            <a:ext cx="2743200" cy="182880"/>
-          </a:xfrm>
-          <a:prstGeom prst="rect">
-            <a:avLst/>
-          </a:prstGeom>
-          <a:noFill/>
-          <a:ln>
-            <a:noFill/>
-          </a:ln>
-        </p:spPr>
-        <p:txBody>
-          <a:bodyPr wrap="square" anchor="b" lIns="0" rIns="0" tIns="27432" bIns="27432"/>
-          <a:lstStyle/>
-          <a:p>
-            <a:pPr algn="l"/>
-            <a:r>
-              <a:rPr lang="en-AU" sz="800" b="1" dirty="0">
-                <a:solidFill>
-                  <a:srgbClr val="6B6A66"/>
-                </a:solidFill>
-                <a:latin typeface="Aptos"/>
-              </a:rPr>
-              <a:t>MOST OFTEN CONFUSED WITH</a:t>
-            </a:r>
-          </a:p>
-        </p:txBody>
-      </p:sp>
-      <p:sp>
-        <p:nvSpPr>
-          <p:cNvPr id="42" name="shape42"/>
-          <p:cNvSpPr/>
-          <p:nvPr/>
-        </p:nvSpPr>
-        <p:spPr>
-          <a:xfrm>
-            <a:off x="457200" y="3639312"/>
-            <a:ext cx="2743200" cy="1737360"/>
-          </a:xfrm>
-          <a:prstGeom prst="rect">
-            <a:avLst/>
-          </a:prstGeom>
-          <a:solidFill>
-            <a:srgbClr val="F7F7F5"/>
-          </a:solidFill>
-          <a:ln>
-            <a:noFill/>
-          </a:ln>
-        </p:spPr>
-        <p:txBody>
-          <a:bodyPr wrap="square" anchor="t" lIns="91440" rIns="91440" tIns="27432" bIns="27432"/>
-          <a:lstStyle/>
-          <a:p>
-            <a:pPr algn="l"/>
-            <a:r>
-              <a:rPr lang="en-AU" sz="900" dirty="0">
-                <a:solidFill>
-                  <a:srgbClr val="0B0B0B"/>
-                </a:solidFill>
-                <a:latin typeface="Aptos"/>
-              </a:rPr>
-              <a:t>Root cause analysis explains why the current state underperforms; it does not design the future state. An item that jumps from a recurring failure to a solution is testing whether you stopped to find the cause.</a:t>
-            </a:r>
-          </a:p>
-        </p:txBody>
-      </p:sp>
-      <p:sp>
-        <p:nvSpPr>
-          <p:cNvPr id="43" name="shape43"/>
-          <p:cNvSpPr/>
-          <p:nvPr/>
-        </p:nvSpPr>
-        <p:spPr>
-          <a:xfrm>
-            <a:off x="457200" y="3639312"/>
-            <a:ext cx="32004" cy="1737360"/>
-          </a:xfrm>
-          <a:prstGeom prst="rect">
-            <a:avLst/>
-          </a:prstGeom>
-          <a:solidFill>
-            <a:srgbClr val="FAB219"/>
-          </a:solidFill>
-          <a:ln>
-            <a:noFill/>
-          </a:ln>
-        </p:spPr>
-        <p:txBody>
-          <a:bodyPr wrap="square" anchor="ctr" lIns="54864" rIns="54864" tIns="27432" bIns="27432"/>
-          <a:lstStyle/>
-          <a:p>
-            <a:pPr algn="l"/>
-            <a:endParaRPr lang="en-AU" sz="1100"/>
-          </a:p>
-        </p:txBody>
-      </p:sp>
-      <p:sp>
-        <p:nvSpPr>
-          <p:cNvPr id="44" name="shape44"/>
-          <p:cNvSpPr/>
-          <p:nvPr/>
-        </p:nvSpPr>
-        <p:spPr>
-          <a:xfrm>
-            <a:off x="457200" y="5486400"/>
-            <a:ext cx="2743200" cy="502920"/>
-          </a:xfrm>
-          <a:prstGeom prst="rect">
-            <a:avLst/>
-          </a:prstGeom>
-          <a:noFill/>
-          <a:ln>
-            <a:noFill/>
-          </a:ln>
-        </p:spPr>
-        <p:txBody>
-          <a:bodyPr wrap="square" anchor="t" lIns="0" rIns="0" tIns="27432" bIns="27432"/>
-          <a:lstStyle/>
-          <a:p>
-            <a:pPr algn="l"/>
-            <a:r>
-              <a:rPr lang="en-AU" sz="800" dirty="0">
-                <a:solidFill>
-                  <a:srgbClr val="6B6A66"/>
-                </a:solidFill>
-                <a:latin typeface="Aptos"/>
-              </a:rPr>
-              <a:t>Tasks: 6.1 Analyze Current State · 8.3 Assess Solution Limitations · 8.4 Assess Enterprise Limitations</a:t>
-            </a:r>
-          </a:p>
-        </p:txBody>
-      </p:sp>
-      <p:sp>
-        <p:nvSpPr>
-          <p:cNvPr id="45" name="shape45"/>
-          <p:cNvSpPr/>
-          <p:nvPr/>
-        </p:nvSpPr>
-        <p:spPr>
-          <a:xfrm>
-            <a:off x="3520440" y="1188720"/>
-            <a:ext cx="8214055" cy="237744"/>
-          </a:xfrm>
-          <a:prstGeom prst="rect">
-            <a:avLst/>
-          </a:prstGeom>
-          <a:noFill/>
-          <a:ln>
-            <a:noFill/>
-          </a:ln>
-        </p:spPr>
-        <p:txBody>
-          <a:bodyPr wrap="square" anchor="b" lIns="0" rIns="0" tIns="27432" bIns="27432"/>
-          <a:lstStyle/>
-          <a:p>
-            <a:pPr algn="l"/>
-            <a:r>
-              <a:rPr lang="en-AU" sz="1050" b="1" dirty="0">
-                <a:solidFill>
-                  <a:srgbClr val="184F95"/>
-                </a:solidFill>
-                <a:latin typeface="Aptos"/>
-              </a:rPr>
-              <a:t>Root Cause Analysis — blank template</a:t>
-            </a:r>
-          </a:p>
-        </p:txBody>
-      </p:sp>
-      <p:sp>
-        <p:nvSpPr>
-          <p:cNvPr id="46" name="shape46"/>
-          <p:cNvSpPr/>
-          <p:nvPr/>
-        </p:nvSpPr>
-        <p:spPr>
-          <a:xfrm>
-            <a:off x="3520440" y="1280160"/>
-            <a:ext cx="8214055" cy="201168"/>
-          </a:xfrm>
-          <a:prstGeom prst="rect">
-            <a:avLst/>
-          </a:prstGeom>
-          <a:noFill/>
-          <a:ln>
-            <a:noFill/>
-          </a:ln>
-        </p:spPr>
-        <p:txBody>
           <a:bodyPr wrap="square" anchor="ctr" lIns="54864" rIns="54864" tIns="27432" bIns="27432"/>
           <a:lstStyle/>
           <a:p>
@@ -3907,14 +3659,14 @@
       </p:sp>
       <p:sp>
         <p:nvSpPr>
-          <p:cNvPr id="47" name="shape47"/>
+          <p:cNvPr id="40" name="shape40"/>
           <p:cNvSpPr/>
           <p:nvPr/>
         </p:nvSpPr>
         <p:spPr>
           <a:xfrm>
-            <a:off x="3520440" y="1499616"/>
-            <a:ext cx="8214055" cy="204216"/>
+            <a:off x="457200" y="1700784"/>
+            <a:ext cx="11277295" cy="235915"/>
           </a:xfrm>
           <a:prstGeom prst="roundRect">
             <a:avLst>
@@ -3949,14 +3701,14 @@
       </p:sp>
       <p:sp>
         <p:nvSpPr>
-          <p:cNvPr id="48" name="shape48"/>
+          <p:cNvPr id="41" name="shape41"/>
           <p:cNvSpPr/>
           <p:nvPr/>
         </p:nvSpPr>
         <p:spPr>
           <a:xfrm>
-            <a:off x="3904488" y="1749552"/>
-            <a:ext cx="7830007" cy="204216"/>
+            <a:off x="841248" y="1982419"/>
+            <a:ext cx="10893247" cy="235915"/>
           </a:xfrm>
           <a:prstGeom prst="roundRect">
             <a:avLst>
@@ -3991,13 +3743,13 @@
       </p:sp>
       <p:cxnSp>
         <p:nvCxnSpPr>
-          <p:cNvPr id="49" name="conn49"/>
+          <p:cNvPr id="42" name="conn42"/>
           <p:cNvCxnSpPr/>
           <p:nvPr/>
         </p:nvCxnSpPr>
         <p:spPr>
           <a:xfrm>
-            <a:off x="3776472" y="1851660"/>
+            <a:off x="713232" y="2100377"/>
             <a:ext cx="128016" cy="1"/>
           </a:xfrm>
           <a:prstGeom prst="line">
@@ -4012,14 +3764,14 @@
       </p:cxnSp>
       <p:sp>
         <p:nvSpPr>
-          <p:cNvPr id="50" name="shape50"/>
+          <p:cNvPr id="43" name="shape43"/>
           <p:cNvSpPr/>
           <p:nvPr/>
         </p:nvSpPr>
         <p:spPr>
           <a:xfrm>
-            <a:off x="4288536" y="1999488"/>
-            <a:ext cx="7445959" cy="204216"/>
+            <a:off x="1225296" y="2264054"/>
+            <a:ext cx="10509199" cy="235915"/>
           </a:xfrm>
           <a:prstGeom prst="roundRect">
             <a:avLst>
@@ -4054,13 +3806,13 @@
       </p:sp>
       <p:cxnSp>
         <p:nvCxnSpPr>
-          <p:cNvPr id="51" name="conn51"/>
+          <p:cNvPr id="44" name="conn44"/>
           <p:cNvCxnSpPr/>
           <p:nvPr/>
         </p:nvCxnSpPr>
         <p:spPr>
           <a:xfrm>
-            <a:off x="4160520" y="2101596"/>
+            <a:off x="1097280" y="2382012"/>
             <a:ext cx="128016" cy="1"/>
           </a:xfrm>
           <a:prstGeom prst="line">
@@ -4075,14 +3827,14 @@
       </p:cxnSp>
       <p:sp>
         <p:nvSpPr>
-          <p:cNvPr id="52" name="shape52"/>
+          <p:cNvPr id="45" name="shape45"/>
           <p:cNvSpPr/>
           <p:nvPr/>
         </p:nvSpPr>
         <p:spPr>
           <a:xfrm>
-            <a:off x="4672584" y="2249424"/>
-            <a:ext cx="7061911" cy="204216"/>
+            <a:off x="1609344" y="2545690"/>
+            <a:ext cx="10125151" cy="235915"/>
           </a:xfrm>
           <a:prstGeom prst="roundRect">
             <a:avLst>
@@ -4117,13 +3869,13 @@
       </p:sp>
       <p:cxnSp>
         <p:nvCxnSpPr>
-          <p:cNvPr id="53" name="conn53"/>
+          <p:cNvPr id="46" name="conn46"/>
           <p:cNvCxnSpPr/>
           <p:nvPr/>
         </p:nvCxnSpPr>
         <p:spPr>
           <a:xfrm>
-            <a:off x="4544568" y="2351532"/>
+            <a:off x="1481328" y="2663647"/>
             <a:ext cx="128016" cy="1"/>
           </a:xfrm>
           <a:prstGeom prst="line">
@@ -4138,14 +3890,14 @@
       </p:cxnSp>
       <p:sp>
         <p:nvSpPr>
-          <p:cNvPr id="54" name="shape54"/>
+          <p:cNvPr id="47" name="shape47"/>
           <p:cNvSpPr/>
           <p:nvPr/>
         </p:nvSpPr>
         <p:spPr>
           <a:xfrm>
-            <a:off x="4672584" y="2499360"/>
-            <a:ext cx="7061911" cy="204216"/>
+            <a:off x="1609344" y="2827325"/>
+            <a:ext cx="10125151" cy="235915"/>
           </a:xfrm>
           <a:prstGeom prst="roundRect">
             <a:avLst>
@@ -4180,13 +3932,13 @@
       </p:sp>
       <p:cxnSp>
         <p:nvCxnSpPr>
-          <p:cNvPr id="55" name="conn55"/>
+          <p:cNvPr id="48" name="conn48"/>
           <p:cNvCxnSpPr/>
           <p:nvPr/>
         </p:nvCxnSpPr>
         <p:spPr>
           <a:xfrm>
-            <a:off x="4544568" y="2601468"/>
+            <a:off x="1481328" y="2945282"/>
             <a:ext cx="128016" cy="1"/>
           </a:xfrm>
           <a:prstGeom prst="line">
@@ -4201,14 +3953,14 @@
       </p:cxnSp>
       <p:sp>
         <p:nvSpPr>
-          <p:cNvPr id="56" name="shape56"/>
+          <p:cNvPr id="49" name="shape49"/>
           <p:cNvSpPr/>
           <p:nvPr/>
         </p:nvSpPr>
         <p:spPr>
           <a:xfrm>
-            <a:off x="4288536" y="2749296"/>
-            <a:ext cx="7445959" cy="204216"/>
+            <a:off x="1225296" y="3108960"/>
+            <a:ext cx="10509199" cy="235915"/>
           </a:xfrm>
           <a:prstGeom prst="roundRect">
             <a:avLst>
@@ -4243,13 +3995,13 @@
       </p:sp>
       <p:cxnSp>
         <p:nvCxnSpPr>
-          <p:cNvPr id="57" name="conn57"/>
+          <p:cNvPr id="50" name="conn50"/>
           <p:cNvCxnSpPr/>
           <p:nvPr/>
         </p:nvCxnSpPr>
         <p:spPr>
           <a:xfrm>
-            <a:off x="4160520" y="2851404"/>
+            <a:off x="1097280" y="3226918"/>
             <a:ext cx="128016" cy="1"/>
           </a:xfrm>
           <a:prstGeom prst="line">
@@ -4264,14 +4016,14 @@
       </p:cxnSp>
       <p:sp>
         <p:nvSpPr>
-          <p:cNvPr id="58" name="shape58"/>
+          <p:cNvPr id="51" name="shape51"/>
           <p:cNvSpPr/>
           <p:nvPr/>
         </p:nvSpPr>
         <p:spPr>
           <a:xfrm>
-            <a:off x="4672584" y="2999232"/>
-            <a:ext cx="7061911" cy="204216"/>
+            <a:off x="1609344" y="3390595"/>
+            <a:ext cx="10125151" cy="235915"/>
           </a:xfrm>
           <a:prstGeom prst="roundRect">
             <a:avLst>
@@ -4306,13 +4058,13 @@
       </p:sp>
       <p:cxnSp>
         <p:nvCxnSpPr>
-          <p:cNvPr id="59" name="conn59"/>
+          <p:cNvPr id="52" name="conn52"/>
           <p:cNvCxnSpPr/>
           <p:nvPr/>
         </p:nvCxnSpPr>
         <p:spPr>
           <a:xfrm>
-            <a:off x="4544568" y="3101340"/>
+            <a:off x="1481328" y="3508553"/>
             <a:ext cx="128016" cy="1"/>
           </a:xfrm>
           <a:prstGeom prst="line">
@@ -4327,14 +4079,14 @@
       </p:cxnSp>
       <p:sp>
         <p:nvSpPr>
-          <p:cNvPr id="60" name="shape60"/>
+          <p:cNvPr id="53" name="shape53"/>
           <p:cNvSpPr/>
           <p:nvPr/>
         </p:nvSpPr>
         <p:spPr>
           <a:xfrm>
-            <a:off x="4672584" y="3249168"/>
-            <a:ext cx="7061911" cy="204216"/>
+            <a:off x="1609344" y="3672230"/>
+            <a:ext cx="10125151" cy="235915"/>
           </a:xfrm>
           <a:prstGeom prst="roundRect">
             <a:avLst>
@@ -4369,13 +4121,13 @@
       </p:sp>
       <p:cxnSp>
         <p:nvCxnSpPr>
-          <p:cNvPr id="61" name="conn61"/>
+          <p:cNvPr id="54" name="conn54"/>
           <p:cNvCxnSpPr/>
           <p:nvPr/>
         </p:nvCxnSpPr>
         <p:spPr>
           <a:xfrm>
-            <a:off x="4544568" y="3351276"/>
+            <a:off x="1481328" y="3790188"/>
             <a:ext cx="128016" cy="1"/>
           </a:xfrm>
           <a:prstGeom prst="line">
@@ -4390,14 +4142,14 @@
       </p:cxnSp>
       <p:sp>
         <p:nvSpPr>
-          <p:cNvPr id="62" name="shape62"/>
+          <p:cNvPr id="55" name="shape55"/>
           <p:cNvSpPr/>
           <p:nvPr/>
         </p:nvSpPr>
         <p:spPr>
           <a:xfrm>
-            <a:off x="3904488" y="3499104"/>
-            <a:ext cx="7830007" cy="204216"/>
+            <a:off x="841248" y="3953866"/>
+            <a:ext cx="10893247" cy="235915"/>
           </a:xfrm>
           <a:prstGeom prst="roundRect">
             <a:avLst>
@@ -4432,13 +4184,13 @@
       </p:sp>
       <p:cxnSp>
         <p:nvCxnSpPr>
-          <p:cNvPr id="63" name="conn63"/>
+          <p:cNvPr id="56" name="conn56"/>
           <p:cNvCxnSpPr/>
           <p:nvPr/>
         </p:nvCxnSpPr>
         <p:spPr>
           <a:xfrm>
-            <a:off x="3776472" y="3601212"/>
+            <a:off x="713232" y="4071823"/>
             <a:ext cx="128016" cy="1"/>
           </a:xfrm>
           <a:prstGeom prst="line">
@@ -4453,14 +4205,14 @@
       </p:cxnSp>
       <p:sp>
         <p:nvSpPr>
-          <p:cNvPr id="64" name="shape64"/>
+          <p:cNvPr id="57" name="shape57"/>
           <p:cNvSpPr/>
           <p:nvPr/>
         </p:nvSpPr>
         <p:spPr>
           <a:xfrm>
-            <a:off x="4288536" y="3749040"/>
-            <a:ext cx="7445959" cy="204216"/>
+            <a:off x="1225296" y="4235501"/>
+            <a:ext cx="10509199" cy="235915"/>
           </a:xfrm>
           <a:prstGeom prst="roundRect">
             <a:avLst>
@@ -4495,13 +4247,13 @@
       </p:sp>
       <p:cxnSp>
         <p:nvCxnSpPr>
-          <p:cNvPr id="65" name="conn65"/>
+          <p:cNvPr id="58" name="conn58"/>
           <p:cNvCxnSpPr/>
           <p:nvPr/>
         </p:nvCxnSpPr>
         <p:spPr>
           <a:xfrm>
-            <a:off x="4160520" y="3851148"/>
+            <a:off x="1097280" y="4353458"/>
             <a:ext cx="128016" cy="1"/>
           </a:xfrm>
           <a:prstGeom prst="line">
@@ -4516,14 +4268,14 @@
       </p:cxnSp>
       <p:sp>
         <p:nvSpPr>
-          <p:cNvPr id="66" name="shape66"/>
+          <p:cNvPr id="59" name="shape59"/>
           <p:cNvSpPr/>
           <p:nvPr/>
         </p:nvSpPr>
         <p:spPr>
           <a:xfrm>
-            <a:off x="4672584" y="3998976"/>
-            <a:ext cx="7061911" cy="204216"/>
+            <a:off x="1609344" y="4517136"/>
+            <a:ext cx="10125151" cy="235915"/>
           </a:xfrm>
           <a:prstGeom prst="roundRect">
             <a:avLst>
@@ -4558,13 +4310,13 @@
       </p:sp>
       <p:cxnSp>
         <p:nvCxnSpPr>
-          <p:cNvPr id="67" name="conn67"/>
+          <p:cNvPr id="60" name="conn60"/>
           <p:cNvCxnSpPr/>
           <p:nvPr/>
         </p:nvCxnSpPr>
         <p:spPr>
           <a:xfrm>
-            <a:off x="4544568" y="4101084"/>
+            <a:off x="1481328" y="4635094"/>
             <a:ext cx="128016" cy="1"/>
           </a:xfrm>
           <a:prstGeom prst="line">
@@ -4579,14 +4331,14 @@
       </p:cxnSp>
       <p:sp>
         <p:nvSpPr>
-          <p:cNvPr id="68" name="shape68"/>
+          <p:cNvPr id="61" name="shape61"/>
           <p:cNvSpPr/>
           <p:nvPr/>
         </p:nvSpPr>
         <p:spPr>
           <a:xfrm>
-            <a:off x="4672584" y="4248912"/>
-            <a:ext cx="7061911" cy="204216"/>
+            <a:off x="1609344" y="4798771"/>
+            <a:ext cx="10125151" cy="235915"/>
           </a:xfrm>
           <a:prstGeom prst="roundRect">
             <a:avLst>
@@ -4621,13 +4373,13 @@
       </p:sp>
       <p:cxnSp>
         <p:nvCxnSpPr>
-          <p:cNvPr id="69" name="conn69"/>
+          <p:cNvPr id="62" name="conn62"/>
           <p:cNvCxnSpPr/>
           <p:nvPr/>
         </p:nvCxnSpPr>
         <p:spPr>
           <a:xfrm>
-            <a:off x="4544568" y="4351020"/>
+            <a:off x="1481328" y="4916729"/>
             <a:ext cx="128016" cy="1"/>
           </a:xfrm>
           <a:prstGeom prst="line">
@@ -4642,14 +4394,14 @@
       </p:cxnSp>
       <p:sp>
         <p:nvSpPr>
-          <p:cNvPr id="70" name="shape70"/>
+          <p:cNvPr id="63" name="shape63"/>
           <p:cNvSpPr/>
           <p:nvPr/>
         </p:nvSpPr>
         <p:spPr>
           <a:xfrm>
-            <a:off x="4288536" y="4498848"/>
-            <a:ext cx="7445959" cy="204216"/>
+            <a:off x="1225296" y="5080406"/>
+            <a:ext cx="10509199" cy="235915"/>
           </a:xfrm>
           <a:prstGeom prst="roundRect">
             <a:avLst>
@@ -4684,13 +4436,13 @@
       </p:sp>
       <p:cxnSp>
         <p:nvCxnSpPr>
-          <p:cNvPr id="71" name="conn71"/>
+          <p:cNvPr id="64" name="conn64"/>
           <p:cNvCxnSpPr/>
           <p:nvPr/>
         </p:nvCxnSpPr>
         <p:spPr>
           <a:xfrm>
-            <a:off x="4160520" y="4600956"/>
+            <a:off x="1097280" y="5198364"/>
             <a:ext cx="128016" cy="1"/>
           </a:xfrm>
           <a:prstGeom prst="line">
@@ -4705,14 +4457,14 @@
       </p:cxnSp>
       <p:sp>
         <p:nvSpPr>
-          <p:cNvPr id="72" name="shape72"/>
+          <p:cNvPr id="65" name="shape65"/>
           <p:cNvSpPr/>
           <p:nvPr/>
         </p:nvSpPr>
         <p:spPr>
           <a:xfrm>
-            <a:off x="4672584" y="4748784"/>
-            <a:ext cx="7061911" cy="204216"/>
+            <a:off x="1609344" y="5362042"/>
+            <a:ext cx="10125151" cy="235915"/>
           </a:xfrm>
           <a:prstGeom prst="roundRect">
             <a:avLst>
@@ -4747,13 +4499,13 @@
       </p:sp>
       <p:cxnSp>
         <p:nvCxnSpPr>
-          <p:cNvPr id="73" name="conn73"/>
+          <p:cNvPr id="66" name="conn66"/>
           <p:cNvCxnSpPr/>
           <p:nvPr/>
         </p:nvCxnSpPr>
         <p:spPr>
           <a:xfrm>
-            <a:off x="4544568" y="4850892"/>
+            <a:off x="1481328" y="5479999"/>
             <a:ext cx="128016" cy="1"/>
           </a:xfrm>
           <a:prstGeom prst="line">
@@ -4768,14 +4520,14 @@
       </p:cxnSp>
       <p:sp>
         <p:nvSpPr>
-          <p:cNvPr id="74" name="shape74"/>
+          <p:cNvPr id="67" name="shape67"/>
           <p:cNvSpPr/>
           <p:nvPr/>
         </p:nvSpPr>
         <p:spPr>
           <a:xfrm>
-            <a:off x="4672584" y="4998720"/>
-            <a:ext cx="7061911" cy="204216"/>
+            <a:off x="1609344" y="5643677"/>
+            <a:ext cx="10125151" cy="235915"/>
           </a:xfrm>
           <a:prstGeom prst="roundRect">
             <a:avLst>
@@ -4810,13 +4562,13 @@
       </p:sp>
       <p:cxnSp>
         <p:nvCxnSpPr>
-          <p:cNvPr id="75" name="conn75"/>
+          <p:cNvPr id="68" name="conn68"/>
           <p:cNvCxnSpPr/>
           <p:nvPr/>
         </p:nvCxnSpPr>
         <p:spPr>
           <a:xfrm>
-            <a:off x="4544568" y="5100828"/>
+            <a:off x="1481328" y="5761634"/>
             <a:ext cx="128016" cy="1"/>
           </a:xfrm>
           <a:prstGeom prst="line">
